--- a/book/slides/pptx/ch07-graph.pptx
+++ b/book/slides/pptx/ch07-graph.pptx
@@ -20097,7 +20097,7 @@
                 <a:ea typeface="Noto Sans CJK SC"/>
                 <a:cs typeface="Segoe UI"/>
               </a:rPr>
-              <a:t>E ll V²</a:t>
+              <a:t>E ≪ V²</a:t>
             </a:r>
             <a:r>
               <a:rPr lang="zh-CN" sz="2340" dirty="0" b="1">
